--- a/vta/slides/Module_6_LTV_1200_The_Platform_Tour.pptx
+++ b/vta/slides/Module_6_LTV_1200_The_Platform_Tour.pptx
@@ -867,9 +867,9 @@
           <a:p>
             <a:r>
               <a:rPr lang="en-US" dirty="0"/>
-              <a:t>Internal battery: lithium-ion, ~60 min at moderate load. Drains FASTER at high FiO₂, high PEEP, rapid rates. Worst-case: ~30 min.
+              <a:t>Internal battery: sealed lead-acid, ~45 min at nominal settings (per the LTV operator manual). Drains FASTER at high FiO₂, high PEEP, rapid rates — plan far less for a sick lung. Always confirm runtime against your unit's manual.
 Battery health degrades over service life. A unit in service &gt; 3 years and never replaced will deliver less than spec. Document unexpected battery alarms.
-On the truck: confirm "line power" on the display before loading the patient. If the AC plug bumps loose, the LTV switches silently to battery without alarm.
+On the truck: confirm "line power" on the display before loading the patient. If external power is lost, the LTV annunciates a POWER LOST alarm and transfers to the internal battery — the switch is NOT silent; acknowledge the alarm and restore AC.
 Pre-flight rule: 100% battery + line power confirmed = ready. Test external battery packs under load — a pack that holds static charge but fails under demand is a transport hazard.</a:t>
             </a:r>
             <a:endParaRPr lang="en-US" dirty="0"/>
@@ -1054,8 +1054,10 @@
 LOW PRESSURE / LOW PEEP — circuit leak, disconnect, ETT cuff leak. Default 4 cmH₂O below set PEEP.
 LOW MINUTE VOLUME — exhaled MV below threshold. Default is often 0 — set this to ~70% of expected MV.
 APNEA — no detected breath in apnea time (default 20 sec). Triggered by complete loss of effort or sensor failure.
-POWER FAILURE / LOW BATTERY — switch to AC immediately. GAS SUPPLY — O₂ source pressure low; check tank, regulator, hose.
-Triage: READ the alarm BEFORE silencing. Silencing without identifying the cause is a sentinel-level safety event.</a:t>
+POWER LOST / LOW BATTERY — external power lost (transfer to internal battery) or battery depleting. Restore AC promptly.
+GAS SUPPLY — O₂ source pressure low; check tank, regulator, and hose.
+Triage: READ the alarm BEFORE silencing. Silencing without identifying the cause is a sentinel-level safety event.
+This is the core set — the operator manual lists additional device and self-test alarms. Know your unit's full alarm list before transport.</a:t>
             </a:r>
             <a:endParaRPr lang="en-US" dirty="0"/>
           </a:p>
@@ -1238,7 +1240,7 @@
             <a:r>
               <a:rPr lang="en-US" dirty="0"/>
               <a:t>Safe-change workflow: 1) Verbalize the change BEFORE you turn the dial. 2) Press SELECT to navigate. 3) Rotate CONTROL knob. 4) Press SELECT (or wait 5 sec) to commit. 5) Reassess in 30 sec. 6) Document with vitals before AND after.
-Common pitfalls from incident reviews: forgetting to set LOW MV alarm; setting PEEP at the dial but forgetting to attach the PEEP valve; pediatric patient on the adult circuit (dead space &gt; Vt); battery silently switching to internal when AC plug bumps loose; POST skipped because "the next shift will do it."</a:t>
+Common pitfalls from incident reviews: forgetting to set LOW MV alarm; setting PEEP at the dial but forgetting to attach the PEEP valve; pediatric patient on the adult circuit (dead space &gt; Vt); missing the POWER LOST alarm when the AC plug bumps loose and the unit transfers to internal battery; POST skipped because "the next shift will do it."</a:t>
             </a:r>
             <a:endParaRPr lang="en-US" dirty="0"/>
           </a:p>
@@ -1968,7 +1970,7 @@
                 <a:ea typeface="Calibri" pitchFamily="34" charset="-122"/>
                 <a:cs typeface="Calibri" pitchFamily="34" charset="-120"/>
               </a:rPr>
-              <a:t>Day 2 · Application</a:t>
+              <a:t>Application</a:t>
             </a:r>
             <a:pPr indent="0" marL="0">
               <a:buNone/>
@@ -1982,7 +1984,7 @@
                 <a:ea typeface="Calibri" pitchFamily="34" charset="-122"/>
                 <a:cs typeface="Calibri" pitchFamily="34" charset="-120"/>
               </a:rPr>
-              <a:t>   ·   ~50 min   ·   6 lessons</a:t>
+              <a:t>   ·   6 lessons</a:t>
             </a:r>
             <a:endParaRPr lang="en-US" sz="1300" dirty="0"/>
           </a:p>
@@ -2500,7 +2502,7 @@
                 <a:ea typeface="Calibri" pitchFamily="34" charset="-122"/>
                 <a:cs typeface="Calibri" pitchFamily="34" charset="-120"/>
               </a:rPr>
-              <a:t>The Six Alarms</a:t>
+              <a:t>The Core Alarms</a:t>
             </a:r>
             <a:endParaRPr lang="en-US" sz="1700" dirty="0"/>
           </a:p>
@@ -3011,7 +3013,7 @@
                 <a:ea typeface="Calibri" pitchFamily="34" charset="-122"/>
                 <a:cs typeface="Calibri" pitchFamily="34" charset="-120"/>
               </a:rPr>
-              <a:t>The Six Alarms</a:t>
+              <a:t>The Core Alarms</a:t>
             </a:r>
             <a:endParaRPr lang="en-US" sz="1100" dirty="0"/>
           </a:p>
@@ -3590,7 +3592,7 @@
         <p:spPr>
           <a:xfrm>
             <a:off x="548640" y="2148840"/>
-            <a:ext cx="6309360" cy="4114800"/>
+            <a:ext cx="6309360" cy="4160520"/>
           </a:xfrm>
           <a:prstGeom prst="rect">
             <a:avLst/>
@@ -3607,7 +3609,7 @@
                 <a:spcPct val="100000"/>
               </a:lnSpc>
               <a:spcAft>
-                <a:spcPts val="900"/>
+                <a:spcPts val="1000"/>
               </a:spcAft>
               <a:buSzPct val="100000"/>
               <a:buChar char="•"/>
@@ -3621,7 +3623,7 @@
                 <a:ea typeface="Calibri" pitchFamily="34" charset="-122"/>
                 <a:cs typeface="Calibri" pitchFamily="34" charset="-120"/>
               </a:rPr>
-              <a:t>Front panel essentials: Power button (top corner, momentary press).</a:t>
+              <a:t>Front panel essentials: Power button (top corner, momentary press). Display (settings on left, monitored on right). Control knob (right of display — scrolls values).</a:t>
             </a:r>
             <a:endParaRPr lang="en-US" sz="1550" dirty="0"/>
           </a:p>
@@ -3631,7 +3633,7 @@
                 <a:spcPct val="100000"/>
               </a:lnSpc>
               <a:spcAft>
-                <a:spcPts val="900"/>
+                <a:spcPts val="1000"/>
               </a:spcAft>
               <a:buSzPct val="100000"/>
               <a:buChar char="•"/>
@@ -3645,7 +3647,7 @@
                 <a:ea typeface="Calibri" pitchFamily="34" charset="-122"/>
                 <a:cs typeface="Calibri" pitchFamily="34" charset="-120"/>
               </a:rPr>
-              <a:t>Side panel: O₂ inlet at 50 PSI (DISS or quick-connect).</a:t>
+              <a:t>Side panel: O₂ inlet at 50 PSI (DISS or quick-connect). Patient circuit ports including the easily-missed exhalation valve drive line.</a:t>
             </a:r>
             <a:endParaRPr lang="en-US" sz="1550" dirty="0"/>
           </a:p>
@@ -3655,7 +3657,7 @@
                 <a:spcPct val="100000"/>
               </a:lnSpc>
               <a:spcAft>
-                <a:spcPts val="900"/>
+                <a:spcPts val="1000"/>
               </a:spcAft>
               <a:buSzPct val="100000"/>
               <a:buChar char="•"/>
@@ -3669,7 +3671,7 @@
                 <a:ea typeface="Calibri" pitchFamily="34" charset="-122"/>
                 <a:cs typeface="Calibri" pitchFamily="34" charset="-120"/>
               </a:rPr>
-              <a:t>Practice on the unit until you can find every control by feel.</a:t>
+              <a:t>Practice on the unit until you can find every control by feel. In a noisy ambulance bay or moving aircraft, you can't read labels.</a:t>
             </a:r>
             <a:endParaRPr lang="en-US" sz="1550" dirty="0"/>
           </a:p>
@@ -3679,7 +3681,7 @@
                 <a:spcPct val="100000"/>
               </a:lnSpc>
               <a:spcAft>
-                <a:spcPts val="900"/>
+                <a:spcPts val="1000"/>
               </a:spcAft>
               <a:buSzPct val="100000"/>
               <a:buChar char="•"/>
@@ -3693,7 +3695,7 @@
                 <a:ea typeface="Calibri" pitchFamily="34" charset="-122"/>
                 <a:cs typeface="Calibri" pitchFamily="34" charset="-120"/>
               </a:rPr>
-              <a:t>The exhalation valve drive line is the most-missed connection.</a:t>
+              <a:t>The exhalation valve drive line is the most-missed connection. Without it, the patient cannot exhale. Verify every POST.</a:t>
             </a:r>
             <a:endParaRPr lang="en-US" sz="1550" dirty="0"/>
           </a:p>
@@ -4002,7 +4004,7 @@
         <p:spPr>
           <a:xfrm>
             <a:off x="548640" y="2148840"/>
-            <a:ext cx="10058400" cy="4114800"/>
+            <a:ext cx="10058400" cy="4160520"/>
           </a:xfrm>
           <a:prstGeom prst="rect">
             <a:avLst/>
@@ -4019,7 +4021,7 @@
                 <a:spcPct val="100000"/>
               </a:lnSpc>
               <a:spcAft>
-                <a:spcPts val="900"/>
+                <a:spcPts val="1000"/>
               </a:spcAft>
               <a:buSzPct val="100000"/>
               <a:buChar char="•"/>
@@ -4033,7 +4035,7 @@
                 <a:ea typeface="Calibri" pitchFamily="34" charset="-122"/>
                 <a:cs typeface="Calibri" pitchFamily="34" charset="-120"/>
               </a:rPr>
-              <a:t>Internal battery: lithium-ion, ~60 min at moderate load.</a:t>
+              <a:t>Internal battery: sealed lead-acid, ~45 min at nominal settings (per the LTV operator manual). Drains FASTER at high FiO₂, high PEEP, rapid rates — plan far less for a sick lung.</a:t>
             </a:r>
             <a:endParaRPr lang="en-US" sz="1550" dirty="0"/>
           </a:p>
@@ -4043,7 +4045,7 @@
                 <a:spcPct val="100000"/>
               </a:lnSpc>
               <a:spcAft>
-                <a:spcPts val="900"/>
+                <a:spcPts val="1000"/>
               </a:spcAft>
               <a:buSzPct val="100000"/>
               <a:buChar char="•"/>
@@ -4057,7 +4059,7 @@
                 <a:ea typeface="Calibri" pitchFamily="34" charset="-122"/>
                 <a:cs typeface="Calibri" pitchFamily="34" charset="-120"/>
               </a:rPr>
-              <a:t>Battery health degrades over service life.</a:t>
+              <a:t>Battery health degrades over service life. A unit in service &gt; 3 years and never replaced will deliver less than spec. Document unexpected battery alarms.</a:t>
             </a:r>
             <a:endParaRPr lang="en-US" sz="1550" dirty="0"/>
           </a:p>
@@ -4067,7 +4069,7 @@
                 <a:spcPct val="100000"/>
               </a:lnSpc>
               <a:spcAft>
-                <a:spcPts val="900"/>
+                <a:spcPts val="1000"/>
               </a:spcAft>
               <a:buSzPct val="100000"/>
               <a:buChar char="•"/>
@@ -4091,7 +4093,7 @@
                 <a:spcPct val="100000"/>
               </a:lnSpc>
               <a:spcAft>
-                <a:spcPts val="900"/>
+                <a:spcPts val="1000"/>
               </a:spcAft>
               <a:buSzPct val="100000"/>
               <a:buChar char="•"/>
@@ -4105,7 +4107,7 @@
                 <a:ea typeface="Calibri" pitchFamily="34" charset="-122"/>
                 <a:cs typeface="Calibri" pitchFamily="34" charset="-120"/>
               </a:rPr>
-              <a:t>Pre-flight rule: 100% battery + line power confirmed = ready.</a:t>
+              <a:t>Pre-flight rule: 100% battery + line power confirmed = ready. Test external battery packs under load — a pack that holds static charge but fails under demand is a transport hazard.</a:t>
             </a:r>
             <a:endParaRPr lang="en-US" sz="1550" dirty="0"/>
           </a:p>
@@ -4269,7 +4271,7 @@
         <p:spPr>
           <a:xfrm>
             <a:off x="548640" y="2148840"/>
-            <a:ext cx="6309360" cy="4114800"/>
+            <a:ext cx="6309360" cy="4160520"/>
           </a:xfrm>
           <a:prstGeom prst="rect">
             <a:avLst/>
@@ -4286,7 +4288,7 @@
                 <a:spcPct val="100000"/>
               </a:lnSpc>
               <a:spcAft>
-                <a:spcPts val="900"/>
+                <a:spcPts val="1000"/>
               </a:spcAft>
               <a:buSzPct val="100000"/>
               <a:buChar char="•"/>
@@ -4300,7 +4302,7 @@
                 <a:ea typeface="Calibri" pitchFamily="34" charset="-122"/>
                 <a:cs typeface="Calibri" pitchFamily="34" charset="-120"/>
               </a:rPr>
-              <a:t>Display is organized left-to-right.</a:t>
+              <a:t>Display is organized left-to-right. SETTINGS on the left — what you programmed. MONITORED VALUES on the right — what the patient is actually receiving.</a:t>
             </a:r>
             <a:endParaRPr lang="en-US" sz="1550" dirty="0"/>
           </a:p>
@@ -4310,7 +4312,7 @@
                 <a:spcPct val="100000"/>
               </a:lnSpc>
               <a:spcAft>
-                <a:spcPts val="900"/>
+                <a:spcPts val="1000"/>
               </a:spcAft>
               <a:buSzPct val="100000"/>
               <a:buChar char="•"/>
@@ -4324,7 +4326,7 @@
                 <a:ea typeface="Calibri" pitchFamily="34" charset="-122"/>
                 <a:cs typeface="Calibri" pitchFamily="34" charset="-120"/>
               </a:rPr>
-              <a:t>Settings half: Mode (top), Vt, RR, FiO₂, PEEP, I:E, trigger sensitivity.</a:t>
+              <a:t>Settings half: Mode (top), Vt, RR, FiO₂, PEEP, I:E, trigger sensitivity. Scan top to bottom on every check.</a:t>
             </a:r>
             <a:endParaRPr lang="en-US" sz="1550" dirty="0"/>
           </a:p>
@@ -4334,7 +4336,7 @@
                 <a:spcPct val="100000"/>
               </a:lnSpc>
               <a:spcAft>
-                <a:spcPts val="900"/>
+                <a:spcPts val="1000"/>
               </a:spcAft>
               <a:buSzPct val="100000"/>
               <a:buChar char="•"/>
@@ -4348,7 +4350,7 @@
                 <a:ea typeface="Calibri" pitchFamily="34" charset="-122"/>
                 <a:cs typeface="Calibri" pitchFamily="34" charset="-120"/>
               </a:rPr>
-              <a:t>Monitored half: PIP, exhaled Vt, total RR (set + spontaneous), exhaled MV, Pplat (when inspiratory hold is pressed), calculated I:E, FiO₂ delivered (if…</a:t>
+              <a:t>Monitored half: PIP, exhaled Vt, total RR (set + spontaneous), exhaled MV, Pplat (when inspiratory hold is pressed), calculated I:E, FiO₂ delivered (if sensor present).</a:t>
             </a:r>
             <a:endParaRPr lang="en-US" sz="1550" dirty="0"/>
           </a:p>
@@ -4358,7 +4360,7 @@
                 <a:spcPct val="100000"/>
               </a:lnSpc>
               <a:spcAft>
-                <a:spcPts val="900"/>
+                <a:spcPts val="1000"/>
               </a:spcAft>
               <a:buSzPct val="100000"/>
               <a:buChar char="•"/>
@@ -4372,7 +4374,7 @@
                 <a:ea typeface="Calibri" pitchFamily="34" charset="-122"/>
                 <a:cs typeface="Calibri" pitchFamily="34" charset="-120"/>
               </a:rPr>
-              <a:t>Divergence between SET Vt and EXHALED Vt is the earliest sign of a leak or compliance change.</a:t>
+              <a:t>Divergence between SET Vt and EXHALED Vt is the earliest sign of a leak or compliance change. Don't silence — investigate.</a:t>
             </a:r>
             <a:endParaRPr lang="en-US" sz="1550" dirty="0"/>
           </a:p>
@@ -4623,7 +4625,7 @@
                 <a:ea typeface="Cambria" pitchFamily="34" charset="-122"/>
                 <a:cs typeface="Cambria" pitchFamily="34" charset="-120"/>
               </a:rPr>
-              <a:t>The Six Alarms</a:t>
+              <a:t>The Core Alarms</a:t>
             </a:r>
             <a:endParaRPr lang="en-US" sz="2900" dirty="0"/>
           </a:p>
@@ -4681,7 +4683,7 @@
         <p:spPr>
           <a:xfrm>
             <a:off x="548640" y="2148840"/>
-            <a:ext cx="10058400" cy="4114800"/>
+            <a:ext cx="10058400" cy="4160520"/>
           </a:xfrm>
           <a:prstGeom prst="rect">
             <a:avLst/>
@@ -4698,13 +4700,13 @@
                 <a:spcPct val="100000"/>
               </a:lnSpc>
               <a:spcAft>
-                <a:spcPts val="900"/>
+                <a:spcPts val="600"/>
               </a:spcAft>
               <a:buSzPct val="100000"/>
               <a:buChar char="•"/>
             </a:pPr>
             <a:r>
-              <a:rPr lang="en-US" sz="1550" dirty="0">
+              <a:rPr lang="en-US" sz="1350" dirty="0">
                 <a:solidFill>
                   <a:srgbClr val="1B2433"/>
                 </a:solidFill>
@@ -4712,9 +4714,9 @@
                 <a:ea typeface="Calibri" pitchFamily="34" charset="-122"/>
                 <a:cs typeface="Calibri" pitchFamily="34" charset="-120"/>
               </a:rPr>
-              <a:t>HIGH PRESSURE — PIP exceeded threshold (default ~40 cmH₂O; set to 35 in lung-protective).</a:t>
-            </a:r>
-            <a:endParaRPr lang="en-US" sz="1550" dirty="0"/>
+              <a:t>HIGH PRESSURE — PIP exceeded threshold (default ~40 cmH₂O; set to 35 in lung-protective). Most common in EMS.</a:t>
+            </a:r>
+            <a:endParaRPr lang="en-US" sz="1350" dirty="0"/>
           </a:p>
           <a:p>
             <a:pPr marL="177800" indent="-177800">
@@ -4722,13 +4724,13 @@
                 <a:spcPct val="100000"/>
               </a:lnSpc>
               <a:spcAft>
-                <a:spcPts val="900"/>
+                <a:spcPts val="600"/>
               </a:spcAft>
               <a:buSzPct val="100000"/>
               <a:buChar char="•"/>
             </a:pPr>
             <a:r>
-              <a:rPr lang="en-US" sz="1550" dirty="0">
+              <a:rPr lang="en-US" sz="1350" dirty="0">
                 <a:solidFill>
                   <a:srgbClr val="1B2433"/>
                 </a:solidFill>
@@ -4736,9 +4738,9 @@
                 <a:ea typeface="Calibri" pitchFamily="34" charset="-122"/>
                 <a:cs typeface="Calibri" pitchFamily="34" charset="-120"/>
               </a:rPr>
-              <a:t>LOW PRESSURE / LOW PEEP — circuit leak, disconnect, ETT cuff leak.</a:t>
-            </a:r>
-            <a:endParaRPr lang="en-US" sz="1550" dirty="0"/>
+              <a:t>LOW PRESSURE / LOW PEEP — circuit leak, disconnect, ETT cuff leak. Default 4 cmH₂O below set PEEP.</a:t>
+            </a:r>
+            <a:endParaRPr lang="en-US" sz="1350" dirty="0"/>
           </a:p>
           <a:p>
             <a:pPr marL="177800" indent="-177800">
@@ -4746,13 +4748,13 @@
                 <a:spcPct val="100000"/>
               </a:lnSpc>
               <a:spcAft>
-                <a:spcPts val="900"/>
+                <a:spcPts val="600"/>
               </a:spcAft>
               <a:buSzPct val="100000"/>
               <a:buChar char="•"/>
             </a:pPr>
             <a:r>
-              <a:rPr lang="en-US" sz="1550" dirty="0">
+              <a:rPr lang="en-US" sz="1350" dirty="0">
                 <a:solidFill>
                   <a:srgbClr val="1B2433"/>
                 </a:solidFill>
@@ -4760,9 +4762,9 @@
                 <a:ea typeface="Calibri" pitchFamily="34" charset="-122"/>
                 <a:cs typeface="Calibri" pitchFamily="34" charset="-120"/>
               </a:rPr>
-              <a:t>LOW MINUTE VOLUME — exhaled MV below threshold.</a:t>
-            </a:r>
-            <a:endParaRPr lang="en-US" sz="1550" dirty="0"/>
+              <a:t>LOW MINUTE VOLUME — exhaled MV below threshold. Default is often 0 — set this to ~70% of expected MV.</a:t>
+            </a:r>
+            <a:endParaRPr lang="en-US" sz="1350" dirty="0"/>
           </a:p>
           <a:p>
             <a:pPr marL="177800" indent="-177800">
@@ -4770,13 +4772,13 @@
                 <a:spcPct val="100000"/>
               </a:lnSpc>
               <a:spcAft>
-                <a:spcPts val="900"/>
+                <a:spcPts val="600"/>
               </a:spcAft>
               <a:buSzPct val="100000"/>
               <a:buChar char="•"/>
             </a:pPr>
             <a:r>
-              <a:rPr lang="en-US" sz="1550" dirty="0">
+              <a:rPr lang="en-US" sz="1350" dirty="0">
                 <a:solidFill>
                   <a:srgbClr val="1B2433"/>
                 </a:solidFill>
@@ -4784,9 +4786,9 @@
                 <a:ea typeface="Calibri" pitchFamily="34" charset="-122"/>
                 <a:cs typeface="Calibri" pitchFamily="34" charset="-120"/>
               </a:rPr>
-              <a:t>APNEA — no detected breath in apnea time (default 20 sec).</a:t>
-            </a:r>
-            <a:endParaRPr lang="en-US" sz="1550" dirty="0"/>
+              <a:t>APNEA — no detected breath in apnea time (default 20 sec). Triggered by complete loss of effort or sensor failure.</a:t>
+            </a:r>
+            <a:endParaRPr lang="en-US" sz="1350" dirty="0"/>
           </a:p>
           <a:p>
             <a:pPr marL="177800" indent="-177800">
@@ -4794,13 +4796,13 @@
                 <a:spcPct val="100000"/>
               </a:lnSpc>
               <a:spcAft>
-                <a:spcPts val="900"/>
+                <a:spcPts val="600"/>
               </a:spcAft>
               <a:buSzPct val="100000"/>
               <a:buChar char="•"/>
             </a:pPr>
             <a:r>
-              <a:rPr lang="en-US" sz="1550" dirty="0">
+              <a:rPr lang="en-US" sz="1350" dirty="0">
                 <a:solidFill>
                   <a:srgbClr val="1B2433"/>
                 </a:solidFill>
@@ -4808,9 +4810,33 @@
                 <a:ea typeface="Calibri" pitchFamily="34" charset="-122"/>
                 <a:cs typeface="Calibri" pitchFamily="34" charset="-120"/>
               </a:rPr>
-              <a:t>POWER FAILURE / LOW BATTERY — switch to AC immediately.</a:t>
-            </a:r>
-            <a:endParaRPr lang="en-US" sz="1550" dirty="0"/>
+              <a:t>POWER LOST / LOW BATTERY — external power lost (transfer to internal battery) or battery depleting. Restore AC promptly.</a:t>
+            </a:r>
+            <a:endParaRPr lang="en-US" sz="1350" dirty="0"/>
+          </a:p>
+          <a:p>
+            <a:pPr marL="177800" indent="-177800">
+              <a:lnSpc>
+                <a:spcPct val="100000"/>
+              </a:lnSpc>
+              <a:spcAft>
+                <a:spcPts val="600"/>
+              </a:spcAft>
+              <a:buSzPct val="100000"/>
+              <a:buChar char="•"/>
+            </a:pPr>
+            <a:r>
+              <a:rPr lang="en-US" sz="1350" dirty="0">
+                <a:solidFill>
+                  <a:srgbClr val="1B2433"/>
+                </a:solidFill>
+                <a:latin typeface="Calibri" pitchFamily="34" charset="0"/>
+                <a:ea typeface="Calibri" pitchFamily="34" charset="-122"/>
+                <a:cs typeface="Calibri" pitchFamily="34" charset="-120"/>
+              </a:rPr>
+              <a:t>GAS SUPPLY — O₂ source pressure low; check tank, regulator, and hose.</a:t>
+            </a:r>
+            <a:endParaRPr lang="en-US" sz="1350" dirty="0"/>
           </a:p>
         </p:txBody>
       </p:sp>
@@ -4972,7 +4998,7 @@
         <p:spPr>
           <a:xfrm>
             <a:off x="548640" y="2148840"/>
-            <a:ext cx="6309360" cy="4114800"/>
+            <a:ext cx="6309360" cy="4160520"/>
           </a:xfrm>
           <a:prstGeom prst="rect">
             <a:avLst/>
@@ -4989,13 +5015,13 @@
                 <a:spcPct val="100000"/>
               </a:lnSpc>
               <a:spcAft>
-                <a:spcPts val="900"/>
+                <a:spcPts val="800"/>
               </a:spcAft>
               <a:buSzPct val="100000"/>
               <a:buChar char="•"/>
             </a:pPr>
             <a:r>
-              <a:rPr lang="en-US" sz="1550" dirty="0">
+              <a:rPr lang="en-US" sz="1450" dirty="0">
                 <a:solidFill>
                   <a:srgbClr val="1B2433"/>
                 </a:solidFill>
@@ -5003,9 +5029,9 @@
                 <a:ea typeface="Calibri" pitchFamily="34" charset="-122"/>
                 <a:cs typeface="Calibri" pitchFamily="34" charset="-120"/>
               </a:rPr>
-              <a:t>Every shift change, every patient.</a:t>
-            </a:r>
-            <a:endParaRPr lang="en-US" sz="1550" dirty="0"/>
+              <a:t>Every shift change, every patient. Five steps.</a:t>
+            </a:r>
+            <a:endParaRPr lang="en-US" sz="1450" dirty="0"/>
           </a:p>
           <a:p>
             <a:pPr marL="177800" indent="-177800">
@@ -5013,13 +5039,13 @@
                 <a:spcPct val="100000"/>
               </a:lnSpc>
               <a:spcAft>
-                <a:spcPts val="900"/>
+                <a:spcPts val="800"/>
               </a:spcAft>
               <a:buSzPct val="100000"/>
               <a:buChar char="•"/>
             </a:pPr>
             <a:r>
-              <a:rPr lang="en-US" sz="1550" dirty="0">
+              <a:rPr lang="en-US" sz="1450" dirty="0">
                 <a:solidFill>
                   <a:srgbClr val="1B2433"/>
                 </a:solidFill>
@@ -5027,9 +5053,9 @@
                 <a:ea typeface="Calibri" pitchFamily="34" charset="-122"/>
                 <a:cs typeface="Calibri" pitchFamily="34" charset="-120"/>
               </a:rPr>
-              <a:t>1.</a:t>
-            </a:r>
-            <a:endParaRPr lang="en-US" sz="1550" dirty="0"/>
+              <a:t>Connect circuit + test lung BEFORE powering on. POST without a circuit is meaningless.</a:t>
+            </a:r>
+            <a:endParaRPr lang="en-US" sz="1450" dirty="0"/>
           </a:p>
           <a:p>
             <a:pPr marL="177800" indent="-177800">
@@ -5037,13 +5063,13 @@
                 <a:spcPct val="100000"/>
               </a:lnSpc>
               <a:spcAft>
-                <a:spcPts val="900"/>
+                <a:spcPts val="800"/>
               </a:spcAft>
               <a:buSzPct val="100000"/>
               <a:buChar char="•"/>
             </a:pPr>
             <a:r>
-              <a:rPr lang="en-US" sz="1550" dirty="0">
+              <a:rPr lang="en-US" sz="1450" dirty="0">
                 <a:solidFill>
                   <a:srgbClr val="1B2433"/>
                 </a:solidFill>
@@ -5051,9 +5077,9 @@
                 <a:ea typeface="Calibri" pitchFamily="34" charset="-122"/>
                 <a:cs typeface="Calibri" pitchFamily="34" charset="-120"/>
               </a:rPr>
-              <a:t>2.</a:t>
-            </a:r>
-            <a:endParaRPr lang="en-US" sz="1550" dirty="0"/>
+              <a:t>Power on. Watch screen for any RED indicator. POST runs automatically — let it complete.</a:t>
+            </a:r>
+            <a:endParaRPr lang="en-US" sz="1450" dirty="0"/>
           </a:p>
           <a:p>
             <a:pPr marL="177800" indent="-177800">
@@ -5061,13 +5087,13 @@
                 <a:spcPct val="100000"/>
               </a:lnSpc>
               <a:spcAft>
-                <a:spcPts val="900"/>
+                <a:spcPts val="800"/>
               </a:spcAft>
               <a:buSzPct val="100000"/>
               <a:buChar char="•"/>
             </a:pPr>
             <a:r>
-              <a:rPr lang="en-US" sz="1550" dirty="0">
+              <a:rPr lang="en-US" sz="1450" dirty="0">
                 <a:solidFill>
                   <a:srgbClr val="1B2433"/>
                 </a:solidFill>
@@ -5075,9 +5101,9 @@
                 <a:ea typeface="Calibri" pitchFamily="34" charset="-122"/>
                 <a:cs typeface="Calibri" pitchFamily="34" charset="-120"/>
               </a:rPr>
-              <a:t>3.</a:t>
-            </a:r>
-            <a:endParaRPr lang="en-US" sz="1550" dirty="0"/>
+              <a:t>Verify alarms by triggering them: occlude circuit (high pressure should fire). Disconnect lung (low pressure should fire).</a:t>
+            </a:r>
+            <a:endParaRPr lang="en-US" sz="1450" dirty="0"/>
           </a:p>
           <a:p>
             <a:pPr marL="177800" indent="-177800">
@@ -5085,13 +5111,13 @@
                 <a:spcPct val="100000"/>
               </a:lnSpc>
               <a:spcAft>
-                <a:spcPts val="900"/>
+                <a:spcPts val="800"/>
               </a:spcAft>
               <a:buSzPct val="100000"/>
               <a:buChar char="•"/>
             </a:pPr>
             <a:r>
-              <a:rPr lang="en-US" sz="1550" dirty="0">
+              <a:rPr lang="en-US" sz="1450" dirty="0">
                 <a:solidFill>
                   <a:srgbClr val="1B2433"/>
                 </a:solidFill>
@@ -5099,9 +5125,9 @@
                 <a:ea typeface="Calibri" pitchFamily="34" charset="-122"/>
                 <a:cs typeface="Calibri" pitchFamily="34" charset="-120"/>
               </a:rPr>
-              <a:t>4.</a:t>
-            </a:r>
-            <a:endParaRPr lang="en-US" sz="1550" dirty="0"/>
+              <a:t>Verify Pplat: press inspiratory hold; confirm reading on display.</a:t>
+            </a:r>
+            <a:endParaRPr lang="en-US" sz="1450" dirty="0"/>
           </a:p>
         </p:txBody>
       </p:sp>
@@ -5408,7 +5434,7 @@
         <p:spPr>
           <a:xfrm>
             <a:off x="548640" y="2148840"/>
-            <a:ext cx="10058400" cy="4114800"/>
+            <a:ext cx="10058400" cy="4160520"/>
           </a:xfrm>
           <a:prstGeom prst="rect">
             <a:avLst/>
@@ -5425,7 +5451,7 @@
                 <a:spcPct val="100000"/>
               </a:lnSpc>
               <a:spcAft>
-                <a:spcPts val="900"/>
+                <a:spcPts val="1000"/>
               </a:spcAft>
               <a:buSzPct val="100000"/>
               <a:buChar char="•"/>
@@ -5439,7 +5465,7 @@
                 <a:ea typeface="Calibri" pitchFamily="34" charset="-122"/>
                 <a:cs typeface="Calibri" pitchFamily="34" charset="-120"/>
               </a:rPr>
-              <a:t>Safe-change workflow: 1) Verbalize the change BEFORE you turn the dial.</a:t>
+              <a:t>Safe-change workflow: 1) Verbalize the change BEFORE you turn the dial. 2) Press SELECT to navigate. 3) Rotate CONTROL knob. 4) Press SELECT (or wait 5 sec) to commit. 5) Reassess in 30 sec.</a:t>
             </a:r>
             <a:endParaRPr lang="en-US" sz="1550" dirty="0"/>
           </a:p>
@@ -5449,7 +5475,7 @@
                 <a:spcPct val="100000"/>
               </a:lnSpc>
               <a:spcAft>
-                <a:spcPts val="900"/>
+                <a:spcPts val="1000"/>
               </a:spcAft>
               <a:buSzPct val="100000"/>
               <a:buChar char="•"/>
@@ -5463,7 +5489,7 @@
                 <a:ea typeface="Calibri" pitchFamily="34" charset="-122"/>
                 <a:cs typeface="Calibri" pitchFamily="34" charset="-120"/>
               </a:rPr>
-              <a:t>Common pitfalls from incident reviews: forgetting to set LOW MV alarm; setting PEEP at the dial but forgetting to attach the PEEP valve; pediatric patient…</a:t>
+              <a:t>Common pitfalls from incident reviews: forgetting to set LOW MV alarm; setting PEEP at the dial but forgetting to attach the PEEP valve; pediatric patient on the adult circuit (dead space &gt; Vt); missing the…</a:t>
             </a:r>
             <a:endParaRPr lang="en-US" sz="1550" dirty="0"/>
           </a:p>
@@ -5987,7 +6013,9 @@
       </p:sp>
       <p:sp>
         <p:nvSpPr>
-          <p:cNvPr id="14" name="Text 12"/>
+          <p:cNvPr id="14" name="Text 12">
+            <a:hlinkClick r:id="rId1" tooltip="Open this module's simulator mission"/>
+          </p:cNvPr>
           <p:cNvSpPr/>
           <p:nvPr/>
         </p:nvSpPr>
@@ -6010,13 +6038,20 @@
               <a:buNone/>
             </a:pPr>
             <a:r>
-              <a:rPr lang="en-US" sz="1700" b="1" dirty="0">
+              <a:rPr lang="en-US" sz="1700" b="1" u="sng" dirty="0">
                 <a:solidFill>
                   <a:srgbClr val="FFFFFF"/>
                 </a:solidFill>
                 <a:latin typeface="Calibri" pitchFamily="34" charset="0"/>
                 <a:ea typeface="Calibri" pitchFamily="34" charset="-122"/>
                 <a:cs typeface="Calibri" pitchFamily="34" charset="-120"/>
+                <a:hlinkClick r:id="rId1" invalidUrl="" action="" tgtFrame="" tooltip="Open this module's simulator mission" history="1" highlightClick="0" endSnd="0">
+                  <a:extLst>
+                    <a:ext uri="{A12FA001-AC4F-418D-AE19-62706E023703}">
+                      <ahyp:hlinkClr xmlns:ahyp="http://schemas.microsoft.com/office/drawing/2018/hyperlinkcolor" val="tx"/>
+                    </a:ext>
+                  </a:extLst>
+                </a:hlinkClick>
               </a:rPr>
               <a:t>LTV 1200 Simulator</a:t>
             </a:r>
@@ -6049,13 +6084,20 @@
               <a:buNone/>
             </a:pPr>
             <a:r>
-              <a:rPr lang="en-US" sz="1250" dirty="0">
-                <a:solidFill>
-                  <a:srgbClr val="A9C2E0"/>
-                </a:solidFill>
-                <a:latin typeface="Calibri" pitchFamily="34" charset="0"/>
-                <a:ea typeface="Calibri" pitchFamily="34" charset="-122"/>
-                <a:cs typeface="Calibri" pitchFamily="34" charset="-120"/>
+              <a:rPr lang="en-US" sz="1250" u="sng" dirty="0">
+                <a:solidFill>
+                  <a:srgbClr val="7FB0E6"/>
+                </a:solidFill>
+                <a:latin typeface="Calibri" pitchFamily="34" charset="0"/>
+                <a:ea typeface="Calibri" pitchFamily="34" charset="-122"/>
+                <a:cs typeface="Calibri" pitchFamily="34" charset="-120"/>
+                <a:hlinkClick r:id="rId2" invalidUrl="" action="" tgtFrame="" tooltip="" history="1" highlightClick="0" endSnd="0">
+                  <a:extLst>
+                    <a:ext uri="{A12FA001-AC4F-418D-AE19-62706E023703}">
+                      <ahyp:hlinkClr xmlns:ahyp="http://schemas.microsoft.com/office/drawing/2018/hyperlinkcolor" val="tx"/>
+                    </a:ext>
+                  </a:extLst>
+                </a:hlinkClick>
               </a:rPr>
               <a:t>vent-ltv1200.html?level=1  —  Learn the controls hands-on: work the LTV 1200 tutorial on the simulator.</a:t>
             </a:r>

--- a/vta/slides/Module_6_LTV_1200_The_Platform_Tour.pptx
+++ b/vta/slides/Module_6_LTV_1200_The_Platform_Tour.pptx
@@ -511,7 +511,7 @@
           <a:p>
             <a:r>
               <a:rPr lang="en-US" dirty="0"/>
-              <a:t>Module 6: LTV 1200 — The Platform Tour. Every knob, every screen, every alarm — without a patient on it. POST every shift, every patient.</a:t>
+              <a:t>Module 6: LTV 1200 — The Platform Tour. Every control, every screen, every alarm — without a patient on it. Check it every shift, every patient.</a:t>
             </a:r>
             <a:endParaRPr lang="en-US" dirty="0"/>
           </a:p>
@@ -775,8 +775,8 @@
           <a:p>
             <a:r>
               <a:rPr lang="en-US" dirty="0"/>
-              <a:t>Front panel essentials: Power button (top corner, momentary press). Display (settings on left, monitored on right). Control knob (right of display — scrolls values). Select button (moves cursor between parameters). Manual breath, Alarm Silence (60-sec mute), Alarm Reset.
-Side panel: O₂ inlet at 50 PSI (DISS or quick-connect). Patient circuit ports including the easily-missed exhalation valve drive line. Battery compartment, AC/DC power, bacterial/viral filter, USB (service only).
+              <a:t>Front panel essentials: On/Standby power. A bank of INDIVIDUAL control windows — one per setting (Breath Rate, Tidal Volume, Pressure Control, Inspiratory Time, Pressure Support, O₂ %, Sensitivity, PEEP) plus the alarm-limit windows. Two Select buttons (Mode and Breath Type). The Set Value knob. Manual Breath, Alarm Silence/Reset, Control Lock, and the display window.
+Side/rear connections: O₂ inlet — high-pressure DISS or a low-pressure fitting depending on configuration. Patient circuit ports including the easily-missed exhalation valve drive line. Battery compartment, external power input, bacterial/viral filter, and a Comm Port for service and data (it is NOT a USB port). Confirm the exact connections on YOUR unit — configurations vary.
 Practice on the unit until you can find every control by feel. In a noisy ambulance bay or moving aircraft, you can't read labels.
 The exhalation valve drive line is the most-missed connection. Without it, the patient cannot exhale. Verify every POST.
 PEARL — Memorize by feel: Spend ten minutes with eyes closed, locating each control by touch. Pays off the first time you have to silence an alarm at 3 a.m. in a moving truck.</a:t>
@@ -958,10 +958,12 @@
           <a:p>
             <a:r>
               <a:rPr lang="en-US" dirty="0"/>
-              <a:t>Display is organized left-to-right. SETTINGS on the left — what you programmed. MONITORED VALUES on the right — what the patient is actually receiving.
-Settings half: Mode (top), Vt, RR, FiO₂, PEEP, I:E, trigger sensitivity. Scan top to bottom on every check.
-Monitored half: PIP, exhaled Vt, total RR (set + spontaneous), exhaled MV, Pplat (when inspiratory hold is pressed), calculated I:E, FiO₂ delivered (if sensor present).
-Divergence between SET Vt and EXHALED Vt is the earliest sign of a leak or compliance change. Don't silence — investigate.
+              <a:t>The LTV does NOT split the screen into a settings half and a monitored half. Each setting lives in its OWN window and you work one at a time: press that control to select it (it brightens, the rest dim), turn the Set Value knob, then confirm.
+Monitored data appears in ONE display window that SCANS — cycling through the measured values one at a time: PIP, MAP, PEEP, f (total rate), Vte (exhaled tidal volume), VE (exhaled minute volume), and I:E. Alarm messages appear in this same window.
+Press Monitor Select once to halt the scan on a value, again to step to the next, or twice quickly to resume scanning.
+Know which numbers you SET and which the vent CALCULATES. You set Inspiratory Time; the vent derives and displays I:E from that and the rate. Trying to dial I:E directly is a common novice error — change Inspiratory Time or the rate instead.
+There is NO continuously monitored plateau pressure on this display. Pplat is obtained with an inspiratory hold maneuver where your unit and configuration support it — confirm the procedure in your operator manual.
+Divergence between SET Vt and EXHALED Vt (Vte) is the earliest sign of a leak or compliance change. Don't silence — investigate.
 PEARL — Set vs Exhaled: Exhaled Vt consistently &lt; set Vt by &gt; 10%? Check ETT cuff, walk the circuit, look at the exhalation valve drive line. Persistent leak = lost PEEP = lost oxygenation.</a:t>
             </a:r>
             <a:endParaRPr lang="en-US" dirty="0"/>
@@ -1145,13 +1147,14 @@
           <a:p>
             <a:r>
               <a:rPr lang="en-US" dirty="0"/>
-              <a:t>Every shift change, every patient. Five steps.
-1. Connect circuit + test lung BEFORE powering on. POST without a circuit is meaningless.
-2. Power on. Watch screen for any RED indicator. POST runs automatically — let it complete.
-3. Verify alarms by triggering them: occlude circuit (high pressure should fire). Disconnect lung (low pressure should fire).
-4. Verify Pplat: press inspiratory hold; confirm reading on display.
-5. Document POST in service equipment log. Pull from service if POST fails.
-EVIDENCE — Why POST: Most field LTV failures are caught during POST. The worst time to find one is mid-transport.</a:t>
+              <a:t>Follow the startup and operational-verification procedure in your operator manual PLUS your agency's documented equipment check. What follows is the SHAPE of that check — it replaces neither document.
+Connect a complete circuit and test lung BEFORE powering on — including the exhalation valve drive line. A checkout without a circuit tests nothing that matters.
+Power on and let the unit finish its self test. Any failure indication means the unit comes out of service — tag it, document it, replace it.
+Answer the patient setup prompt, then load and verify settings appropriate to your patient before connecting them.
+Set alarm limits for THIS patient — especially Low Minute Volume, which commonly sits at a value that will never alarm.
+Verify the gas source at the required pressure, the battery state of charge, and that the display indicates external power when docked.
+Document the check per agency policy.
+EVIDENCE — Why the pre-use check: Most field LTV failures are caught during pre-use checkout — the worst time to find one is mid-transport. The manufacturer's instructions and your agency policy control the exact steps and their order.</a:t>
             </a:r>
             <a:endParaRPr lang="en-US" dirty="0"/>
           </a:p>
@@ -1239,7 +1242,7 @@
           <a:p>
             <a:r>
               <a:rPr lang="en-US" dirty="0"/>
-              <a:t>Safe-change workflow: 1) Verbalize the change BEFORE you turn the dial. 2) Press SELECT to navigate. 3) Rotate CONTROL knob. 4) Press SELECT (or wait 5 sec) to commit. 5) Reassess in 30 sec. 6) Document with vitals before AND after.
+              <a:t>Safe-change workflow: 1) Verbalize the change BEFORE you touch the panel. 2) Press that control's window to SELECT it — it brightens, the rest dim. 3) Turn the Set Value knob. 4) Confirm — press the control again, select another, press Control Lock, or let it time out. 5) Reassess in 30 sec. 6) Document with vitals before AND after.
 Common pitfalls from incident reviews: forgetting to set LOW MV alarm; setting PEEP at the dial but forgetting to attach the PEEP valve; pediatric patient on the adult circuit (dead space &gt; Vt); missing the POWER LOST alarm when the AC plug bumps loose and the unit transfers to internal battery; POST skipped because "the next shift will do it."</a:t>
             </a:r>
             <a:endParaRPr lang="en-US" dirty="0"/>
@@ -1931,7 +1934,7 @@
                 <a:ea typeface="Calibri" pitchFamily="34" charset="-122"/>
                 <a:cs typeface="Calibri" pitchFamily="34" charset="-120"/>
               </a:rPr>
-              <a:t>Every knob, every screen, every alarm — without a patient on it. POST every shift, every patient.</a:t>
+              <a:t>Every control, every screen, every alarm — without a patient on it. Check it every shift, every patient.</a:t>
             </a:r>
             <a:endParaRPr lang="en-US" sz="1600" dirty="0"/>
           </a:p>
@@ -3098,7 +3101,7 @@
                 <a:ea typeface="Calibri" pitchFamily="34" charset="-122"/>
                 <a:cs typeface="Calibri" pitchFamily="34" charset="-120"/>
               </a:rPr>
-              <a:t>POST  </a:t>
+              <a:t>Checkout  </a:t>
             </a:r>
             <a:pPr indent="0" marL="0">
               <a:lnSpc>
@@ -3115,7 +3118,7 @@
                 <a:ea typeface="Calibri" pitchFamily="34" charset="-122"/>
                 <a:cs typeface="Calibri" pitchFamily="34" charset="-120"/>
               </a:rPr>
-              <a:t>Power-On Self-Test</a:t>
+              <a:t>Startup and Pre-Use Checkout</a:t>
             </a:r>
             <a:endParaRPr lang="en-US" sz="1100" dirty="0"/>
           </a:p>
@@ -3623,7 +3626,7 @@
                 <a:ea typeface="Calibri" pitchFamily="34" charset="-122"/>
                 <a:cs typeface="Calibri" pitchFamily="34" charset="-120"/>
               </a:rPr>
-              <a:t>Front panel essentials: Power button (top corner, momentary press). Display (settings on left, monitored on right). Control knob (right of display — scrolls values).</a:t>
+              <a:t>Front panel essentials: On/Standby power.</a:t>
             </a:r>
             <a:endParaRPr lang="en-US" sz="1550" dirty="0"/>
           </a:p>
@@ -3647,7 +3650,7 @@
                 <a:ea typeface="Calibri" pitchFamily="34" charset="-122"/>
                 <a:cs typeface="Calibri" pitchFamily="34" charset="-120"/>
               </a:rPr>
-              <a:t>Side panel: O₂ inlet at 50 PSI (DISS or quick-connect). Patient circuit ports including the easily-missed exhalation valve drive line.</a:t>
+              <a:t>Side/rear connections: O₂ inlet — high-pressure DISS or a low-pressure fitting depending on configuration. Patient circuit ports including the easily-missed exhalation valve drive line.</a:t>
             </a:r>
             <a:endParaRPr lang="en-US" sz="1550" dirty="0"/>
           </a:p>
@@ -4288,13 +4291,13 @@
                 <a:spcPct val="100000"/>
               </a:lnSpc>
               <a:spcAft>
-                <a:spcPts val="1000"/>
+                <a:spcPts val="800"/>
               </a:spcAft>
               <a:buSzPct val="100000"/>
               <a:buChar char="•"/>
             </a:pPr>
             <a:r>
-              <a:rPr lang="en-US" sz="1550" dirty="0">
+              <a:rPr lang="en-US" sz="1450" dirty="0">
                 <a:solidFill>
                   <a:srgbClr val="1B2433"/>
                 </a:solidFill>
@@ -4302,9 +4305,9 @@
                 <a:ea typeface="Calibri" pitchFamily="34" charset="-122"/>
                 <a:cs typeface="Calibri" pitchFamily="34" charset="-120"/>
               </a:rPr>
-              <a:t>Display is organized left-to-right. SETTINGS on the left — what you programmed. MONITORED VALUES on the right — what the patient is actually receiving.</a:t>
-            </a:r>
-            <a:endParaRPr lang="en-US" sz="1550" dirty="0"/>
+              <a:t>The LTV does NOT split the screen into a settings half and a monitored half.</a:t>
+            </a:r>
+            <a:endParaRPr lang="en-US" sz="1450" dirty="0"/>
           </a:p>
           <a:p>
             <a:pPr marL="177800" indent="-177800">
@@ -4312,13 +4315,13 @@
                 <a:spcPct val="100000"/>
               </a:lnSpc>
               <a:spcAft>
-                <a:spcPts val="1000"/>
+                <a:spcPts val="800"/>
               </a:spcAft>
               <a:buSzPct val="100000"/>
               <a:buChar char="•"/>
             </a:pPr>
             <a:r>
-              <a:rPr lang="en-US" sz="1550" dirty="0">
+              <a:rPr lang="en-US" sz="1450" dirty="0">
                 <a:solidFill>
                   <a:srgbClr val="1B2433"/>
                 </a:solidFill>
@@ -4326,9 +4329,9 @@
                 <a:ea typeface="Calibri" pitchFamily="34" charset="-122"/>
                 <a:cs typeface="Calibri" pitchFamily="34" charset="-120"/>
               </a:rPr>
-              <a:t>Settings half: Mode (top), Vt, RR, FiO₂, PEEP, I:E, trigger sensitivity. Scan top to bottom on every check.</a:t>
-            </a:r>
-            <a:endParaRPr lang="en-US" sz="1550" dirty="0"/>
+              <a:t>Monitored data appears in ONE display window that SCANS — cycling through the measured values one at a time: PIP, MAP, PEEP, f (total rate), Vte (exhaled tidal volume), VE (exhaled minute volume), and I:E.</a:t>
+            </a:r>
+            <a:endParaRPr lang="en-US" sz="1450" dirty="0"/>
           </a:p>
           <a:p>
             <a:pPr marL="177800" indent="-177800">
@@ -4336,13 +4339,13 @@
                 <a:spcPct val="100000"/>
               </a:lnSpc>
               <a:spcAft>
-                <a:spcPts val="1000"/>
+                <a:spcPts val="800"/>
               </a:spcAft>
               <a:buSzPct val="100000"/>
               <a:buChar char="•"/>
             </a:pPr>
             <a:r>
-              <a:rPr lang="en-US" sz="1550" dirty="0">
+              <a:rPr lang="en-US" sz="1450" dirty="0">
                 <a:solidFill>
                   <a:srgbClr val="1B2433"/>
                 </a:solidFill>
@@ -4350,9 +4353,9 @@
                 <a:ea typeface="Calibri" pitchFamily="34" charset="-122"/>
                 <a:cs typeface="Calibri" pitchFamily="34" charset="-120"/>
               </a:rPr>
-              <a:t>Monitored half: PIP, exhaled Vt, total RR (set + spontaneous), exhaled MV, Pplat (when inspiratory hold is pressed), calculated I:E, FiO₂ delivered (if sensor present).</a:t>
-            </a:r>
-            <a:endParaRPr lang="en-US" sz="1550" dirty="0"/>
+              <a:t>Press Monitor Select once to halt the scan on a value, again to step to the next, or twice quickly to resume scanning.</a:t>
+            </a:r>
+            <a:endParaRPr lang="en-US" sz="1450" dirty="0"/>
           </a:p>
           <a:p>
             <a:pPr marL="177800" indent="-177800">
@@ -4360,13 +4363,13 @@
                 <a:spcPct val="100000"/>
               </a:lnSpc>
               <a:spcAft>
-                <a:spcPts val="1000"/>
+                <a:spcPts val="800"/>
               </a:spcAft>
               <a:buSzPct val="100000"/>
               <a:buChar char="•"/>
             </a:pPr>
             <a:r>
-              <a:rPr lang="en-US" sz="1550" dirty="0">
+              <a:rPr lang="en-US" sz="1450" dirty="0">
                 <a:solidFill>
                   <a:srgbClr val="1B2433"/>
                 </a:solidFill>
@@ -4374,9 +4377,33 @@
                 <a:ea typeface="Calibri" pitchFamily="34" charset="-122"/>
                 <a:cs typeface="Calibri" pitchFamily="34" charset="-120"/>
               </a:rPr>
-              <a:t>Divergence between SET Vt and EXHALED Vt is the earliest sign of a leak or compliance change. Don't silence — investigate.</a:t>
-            </a:r>
-            <a:endParaRPr lang="en-US" sz="1550" dirty="0"/>
+              <a:t>Know which numbers you SET and which the vent CALCULATES. You set Inspiratory Time; the vent derives and displays I:E from that and the rate.</a:t>
+            </a:r>
+            <a:endParaRPr lang="en-US" sz="1450" dirty="0"/>
+          </a:p>
+          <a:p>
+            <a:pPr marL="177800" indent="-177800">
+              <a:lnSpc>
+                <a:spcPct val="100000"/>
+              </a:lnSpc>
+              <a:spcAft>
+                <a:spcPts val="800"/>
+              </a:spcAft>
+              <a:buSzPct val="100000"/>
+              <a:buChar char="•"/>
+            </a:pPr>
+            <a:r>
+              <a:rPr lang="en-US" sz="1450" dirty="0">
+                <a:solidFill>
+                  <a:srgbClr val="1B2433"/>
+                </a:solidFill>
+                <a:latin typeface="Calibri" pitchFamily="34" charset="0"/>
+                <a:ea typeface="Calibri" pitchFamily="34" charset="-122"/>
+                <a:cs typeface="Calibri" pitchFamily="34" charset="-120"/>
+              </a:rPr>
+              <a:t>There is NO continuously monitored plateau pressure on this display.</a:t>
+            </a:r>
+            <a:endParaRPr lang="en-US" sz="1450" dirty="0"/>
           </a:p>
         </p:txBody>
       </p:sp>
@@ -4898,7 +4925,7 @@
                 <a:ea typeface="Calibri" pitchFamily="34" charset="-122"/>
                 <a:cs typeface="Calibri" pitchFamily="34" charset="-120"/>
               </a:rPr>
-              <a:t>6.5 · POST</a:t>
+              <a:t>6.5 · Checkout</a:t>
             </a:r>
             <a:endParaRPr lang="en-US" sz="1250" dirty="0"/>
           </a:p>
@@ -4940,7 +4967,7 @@
                 <a:ea typeface="Cambria" pitchFamily="34" charset="-122"/>
                 <a:cs typeface="Cambria" pitchFamily="34" charset="-120"/>
               </a:rPr>
-              <a:t>Power-On Self-Test</a:t>
+              <a:t>Startup and Pre-Use Checkout</a:t>
             </a:r>
             <a:endParaRPr lang="en-US" sz="2900" dirty="0"/>
           </a:p>
@@ -5029,7 +5056,7 @@
                 <a:ea typeface="Calibri" pitchFamily="34" charset="-122"/>
                 <a:cs typeface="Calibri" pitchFamily="34" charset="-120"/>
               </a:rPr>
-              <a:t>Every shift change, every patient. Five steps.</a:t>
+              <a:t>Follow the startup and operational-verification procedure in your operator manual PLUS your agency's documented equipment check. What follows is the SHAPE of that check — it replaces neither document.</a:t>
             </a:r>
             <a:endParaRPr lang="en-US" sz="1450" dirty="0"/>
           </a:p>
@@ -5053,7 +5080,7 @@
                 <a:ea typeface="Calibri" pitchFamily="34" charset="-122"/>
                 <a:cs typeface="Calibri" pitchFamily="34" charset="-120"/>
               </a:rPr>
-              <a:t>Connect circuit + test lung BEFORE powering on. POST without a circuit is meaningless.</a:t>
+              <a:t>Connect a complete circuit and test lung BEFORE powering on — including the exhalation valve drive line. A checkout without a circuit tests nothing that matters.</a:t>
             </a:r>
             <a:endParaRPr lang="en-US" sz="1450" dirty="0"/>
           </a:p>
@@ -5077,7 +5104,7 @@
                 <a:ea typeface="Calibri" pitchFamily="34" charset="-122"/>
                 <a:cs typeface="Calibri" pitchFamily="34" charset="-120"/>
               </a:rPr>
-              <a:t>Power on. Watch screen for any RED indicator. POST runs automatically — let it complete.</a:t>
+              <a:t>Power on and let the unit finish its self test. Any failure indication means the unit comes out of service — tag it, document it, replace it.</a:t>
             </a:r>
             <a:endParaRPr lang="en-US" sz="1450" dirty="0"/>
           </a:p>
@@ -5101,7 +5128,7 @@
                 <a:ea typeface="Calibri" pitchFamily="34" charset="-122"/>
                 <a:cs typeface="Calibri" pitchFamily="34" charset="-120"/>
               </a:rPr>
-              <a:t>Verify alarms by triggering them: occlude circuit (high pressure should fire). Disconnect lung (low pressure should fire).</a:t>
+              <a:t>Answer the patient setup prompt, then load and verify settings appropriate to your patient before connecting them.</a:t>
             </a:r>
             <a:endParaRPr lang="en-US" sz="1450" dirty="0"/>
           </a:p>
@@ -5125,7 +5152,7 @@
                 <a:ea typeface="Calibri" pitchFamily="34" charset="-122"/>
                 <a:cs typeface="Calibri" pitchFamily="34" charset="-120"/>
               </a:rPr>
-              <a:t>Verify Pplat: press inspiratory hold; confirm reading on display.</a:t>
+              <a:t>Set alarm limits for THIS patient — especially Low Minute Volume, which commonly sits at a value that will never alarm.</a:t>
             </a:r>
             <a:endParaRPr lang="en-US" sz="1450" dirty="0"/>
           </a:p>
@@ -5228,7 +5255,7 @@
                 <a:ea typeface="Cambria" pitchFamily="34" charset="-122"/>
                 <a:cs typeface="Cambria" pitchFamily="34" charset="-120"/>
               </a:rPr>
-              <a:t>Why POST</a:t>
+              <a:t>Why the pre-use check</a:t>
             </a:r>
             <a:endParaRPr lang="en-US" sz="1700" dirty="0"/>
           </a:p>
@@ -5270,7 +5297,7 @@
                 <a:ea typeface="Calibri" pitchFamily="34" charset="-122"/>
                 <a:cs typeface="Calibri" pitchFamily="34" charset="-120"/>
               </a:rPr>
-              <a:t>Most field LTV failures are caught during POST. The worst time to find one is mid-transport.</a:t>
+              <a:t>Most field LTV failures are caught during pre-use checkout — the worst time to find one is mid-transport. The manufacturer's instructions and your agency policy control the exact steps and their order.</a:t>
             </a:r>
             <a:endParaRPr lang="en-US" sz="1350" dirty="0"/>
           </a:p>
@@ -5465,7 +5492,7 @@
                 <a:ea typeface="Calibri" pitchFamily="34" charset="-122"/>
                 <a:cs typeface="Calibri" pitchFamily="34" charset="-120"/>
               </a:rPr>
-              <a:t>Safe-change workflow: 1) Verbalize the change BEFORE you turn the dial. 2) Press SELECT to navigate. 3) Rotate CONTROL knob. 4) Press SELECT (or wait 5 sec) to commit. 5) Reassess in 30 sec.</a:t>
+              <a:t>Safe-change workflow: 1) Verbalize the change BEFORE you touch the panel. 2) Press that control's window to SELECT it — it brightens, the rest dim. 3) Turn the Set Value knob.</a:t>
             </a:r>
             <a:endParaRPr lang="en-US" sz="1550" dirty="0"/>
           </a:p>

--- a/vta/slides/Module_6_LTV_1200_The_Platform_Tour.pptx
+++ b/vta/slides/Module_6_LTV_1200_The_Platform_Tour.pptx
@@ -3704,151 +3704,30 @@
           </a:p>
         </p:txBody>
       </p:sp>
-      <p:sp>
-        <p:nvSpPr>
-          <p:cNvPr id="6" name="Shape 4"/>
-          <p:cNvSpPr/>
-          <p:nvPr/>
-        </p:nvSpPr>
-        <p:spPr>
-          <a:xfrm>
-            <a:off x="7315200" y="2148840"/>
-            <a:ext cx="4325112" cy="3840480"/>
-          </a:xfrm>
-          <a:prstGeom prst="roundRect">
-            <a:avLst>
-              <a:gd name="adj" fmla="val 2381"/>
-            </a:avLst>
-          </a:prstGeom>
-          <a:solidFill>
-            <a:srgbClr val="FBEFDD"/>
-          </a:solidFill>
-          <a:ln/>
-        </p:spPr>
-      </p:sp>
-      <p:sp>
-        <p:nvSpPr>
-          <p:cNvPr id="7" name="Text 5"/>
-          <p:cNvSpPr/>
-          <p:nvPr/>
-        </p:nvSpPr>
-        <p:spPr>
-          <a:xfrm>
-            <a:off x="7589520" y="2377440"/>
-            <a:ext cx="3776472" cy="320040"/>
+      <p:pic>
+        <p:nvPicPr>
+          <p:cNvPr id="6" name="Image 0" descr="/tmp/claude-0/-home-user-amr-kc-protocols/883711fe-5eaa-500f-ae13-4d63d2ddcc7e/scratchpad/pngs/ltv_panel.jpg">    </p:cNvPr>
+          <p:cNvPicPr>
+            <a:picLocks noChangeAspect="1"/>
+          </p:cNvPicPr>
+          <p:nvPr/>
+        </p:nvPicPr>
+        <p:blipFill>
+          <a:blip r:embed="rId1"/>
+          <a:stretch>
+            <a:fillRect/>
+          </a:stretch>
+        </p:blipFill>
+        <p:spPr>
+          <a:xfrm>
+            <a:off x="8446494" y="1965960"/>
+            <a:ext cx="2217972" cy="4389120"/>
           </a:xfrm>
           <a:prstGeom prst="rect">
             <a:avLst/>
           </a:prstGeom>
-          <a:noFill/>
-          <a:ln/>
-        </p:spPr>
-        <p:txBody>
-          <a:bodyPr wrap="square" rtlCol="0" anchor="ctr"/>
-          <a:lstStyle/>
-          <a:p>
-            <a:pPr indent="0" marL="0">
-              <a:buNone/>
-            </a:pPr>
-            <a:r>
-              <a:rPr lang="en-US" sz="1200" b="1" spc="200" kern="0" dirty="0">
-                <a:solidFill>
-                  <a:srgbClr val="9C540B"/>
-                </a:solidFill>
-                <a:latin typeface="Calibri" pitchFamily="34" charset="0"/>
-                <a:ea typeface="Calibri" pitchFamily="34" charset="-122"/>
-                <a:cs typeface="Calibri" pitchFamily="34" charset="-120"/>
-              </a:rPr>
-              <a:t>CLINICAL PEARL</a:t>
-            </a:r>
-            <a:endParaRPr lang="en-US" sz="1200" dirty="0"/>
-          </a:p>
-        </p:txBody>
-      </p:sp>
-      <p:sp>
-        <p:nvSpPr>
-          <p:cNvPr id="8" name="Text 6"/>
-          <p:cNvSpPr/>
-          <p:nvPr/>
-        </p:nvSpPr>
-        <p:spPr>
-          <a:xfrm>
-            <a:off x="7589520" y="2715768"/>
-            <a:ext cx="3776472" cy="640080"/>
-          </a:xfrm>
-          <a:prstGeom prst="rect">
-            <a:avLst/>
-          </a:prstGeom>
-          <a:noFill/>
-          <a:ln/>
-        </p:spPr>
-        <p:txBody>
-          <a:bodyPr wrap="square" rtlCol="0" anchor="t"/>
-          <a:lstStyle/>
-          <a:p>
-            <a:pPr indent="0" marL="0">
-              <a:lnSpc>
-                <a:spcPct val="95000"/>
-              </a:lnSpc>
-              <a:buNone/>
-            </a:pPr>
-            <a:r>
-              <a:rPr lang="en-US" sz="1700" b="1" dirty="0">
-                <a:solidFill>
-                  <a:srgbClr val="173A68"/>
-                </a:solidFill>
-                <a:latin typeface="Cambria" pitchFamily="34" charset="0"/>
-                <a:ea typeface="Cambria" pitchFamily="34" charset="-122"/>
-                <a:cs typeface="Cambria" pitchFamily="34" charset="-120"/>
-              </a:rPr>
-              <a:t>Memorize by feel</a:t>
-            </a:r>
-            <a:endParaRPr lang="en-US" sz="1700" dirty="0"/>
-          </a:p>
-        </p:txBody>
-      </p:sp>
-      <p:sp>
-        <p:nvSpPr>
-          <p:cNvPr id="9" name="Text 7"/>
-          <p:cNvSpPr/>
-          <p:nvPr/>
-        </p:nvSpPr>
-        <p:spPr>
-          <a:xfrm>
-            <a:off x="7589520" y="3474720"/>
-            <a:ext cx="3776472" cy="2286000"/>
-          </a:xfrm>
-          <a:prstGeom prst="rect">
-            <a:avLst/>
-          </a:prstGeom>
-          <a:noFill/>
-          <a:ln/>
-        </p:spPr>
-        <p:txBody>
-          <a:bodyPr wrap="square" rtlCol="0" anchor="t"/>
-          <a:lstStyle/>
-          <a:p>
-            <a:pPr indent="0" marL="0">
-              <a:lnSpc>
-                <a:spcPct val="103000"/>
-              </a:lnSpc>
-              <a:buNone/>
-            </a:pPr>
-            <a:r>
-              <a:rPr lang="en-US" sz="1350" dirty="0">
-                <a:solidFill>
-                  <a:srgbClr val="1B2433"/>
-                </a:solidFill>
-                <a:latin typeface="Calibri" pitchFamily="34" charset="0"/>
-                <a:ea typeface="Calibri" pitchFamily="34" charset="-122"/>
-                <a:cs typeface="Calibri" pitchFamily="34" charset="-120"/>
-              </a:rPr>
-              <a:t>Spend ten minutes with eyes closed, locating each control by touch. Pays off the first time you have to silence an alarm at 3 a.m. in a moving truck.</a:t>
-            </a:r>
-            <a:endParaRPr lang="en-US" sz="1350" dirty="0"/>
-          </a:p>
-        </p:txBody>
-      </p:sp>
+        </p:spPr>
+      </p:pic>
     </p:spTree>
   </p:cSld>
   <p:clrMapOvr>
